--- a/PhoneWhisperer_ppt.pptx
+++ b/PhoneWhisperer_ppt.pptx
@@ -119,6 +119,14 @@
     </p:ext>
   </p:extLst>
 </p:presentation>
+</file>
+
+<file path=ppt/revisionInfo.xml><?xml version="1.0" encoding="utf-8"?>
+<p1510:revInfo xmlns:a="http://schemas.openxmlformats.org/drawingml/2006/main" xmlns:r="http://schemas.openxmlformats.org/officeDocument/2006/relationships" xmlns:p1510="http://schemas.microsoft.com/office/powerpoint/2015/10/main">
+  <p1510:revLst>
+    <p1510:client id="{6B956157-0819-4F26-9D50-34C9F6C6A201}" v="2" dt="2026-05-08T18:30:37.808"/>
+  </p1510:revLst>
+</p1510:revInfo>
 </file>
 
 <file path=ppt/notesMasters/notesMaster1.xml><?xml version="1.0" encoding="utf-8"?>
@@ -11041,6 +11049,7 @@
                 <a:latin typeface="Calibri" pitchFamily="34" charset="0"/>
                 <a:ea typeface="Calibri" pitchFamily="34" charset="-122"/>
                 <a:cs typeface="Calibri" pitchFamily="34" charset="-120"/>
+                <a:hlinkClick r:id="rId3"/>
               </a:rPr>
               <a:t>https://github.com/AbhiLight07/PhoneWhisperer.git</a:t>
             </a:r>
@@ -11194,6 +11203,7 @@
                 <a:latin typeface="Calibri" pitchFamily="34" charset="0"/>
                 <a:ea typeface="Calibri" pitchFamily="34" charset="-122"/>
                 <a:cs typeface="Calibri" pitchFamily="34" charset="-120"/>
+                <a:hlinkClick r:id="rId4"/>
               </a:rPr>
               <a:t>https://youtu.be/8WLLRvkJbv4</a:t>
             </a:r>
